--- a/docs/submission/presentation/ariadna.pptx
+++ b/docs/submission/presentation/ariadna.pptx
@@ -3877,7 +3877,23 @@
                 </a:solidFill>
                 <a:latin typeface="Calibri"/>
               </a:rPr>
-              <a:t>●  Видео-демо: [ссылка]</a:t>
+              <a:t>●  Видео и материалы: disk.yandex.ru/d/Vo0tJWsdzO_sIg</a:t>
+            </a:r>
+          </a:p>
+          <a:p>
+            <a:pPr>
+              <a:spcAft>
+                <a:spcPts val="1600"/>
+              </a:spcAft>
+            </a:pPr>
+            <a:r>
+              <a:rPr sz="2000">
+                <a:solidFill>
+                  <a:srgbClr val="C9D6E8"/>
+                </a:solidFill>
+                <a:latin typeface="Calibri"/>
+              </a:rPr>
+              <a:t>●  Код: github.com/Dikoper/ARIADNA-NEO4j-RAG</a:t>
             </a:r>
           </a:p>
         </p:txBody>
